--- a/presentation/presentacion_parcial.pptx
+++ b/presentation/presentacion_parcial.pptx
@@ -4270,7 +4270,7 @@
               <a:defRPr sz="2200"/>
             </a:pPr>
             <a:r>
-              <a:t>Modelo final: KMeans k=3.</a:t>
+              <a:t>Modelo final: KMeans k=2.</a:t>
             </a:r>
           </a:p>
         </p:txBody>
